--- a/03_Private_Equity/presentations/pe-public-home-depot-2023-ic-memo.pptx
+++ b/03_Private_Equity/presentations/pe-public-home-depot-2023-ic-memo.pptx
@@ -188,25 +188,25 @@
                 <c:formatCode>General</c:formatCode>
                 <c:ptCount val="7"/>
                 <c:pt idx="0">
-                  <c:v>0.894960124840372</c:v>
+                  <c:v>0.894958397484953</c:v>
                 </c:pt>
                 <c:pt idx="1">
-                  <c:v>0.929841185806055</c:v>
+                  <c:v>0.929837612069633</c:v>
                 </c:pt>
                 <c:pt idx="2">
-                  <c:v>0.965839864670048</c:v>
+                  <c:v>0.965834309462759</c:v>
                 </c:pt>
                 <c:pt idx="3">
-                  <c:v>1.00312784669497</c:v>
+                  <c:v>1.00312016419316</c:v>
                 </c:pt>
                 <c:pt idx="4">
-                  <c:v>1.04187904238102</c:v>
+                  <c:v>1.04186907558302</c:v>
                 </c:pt>
                 <c:pt idx="5">
-                  <c:v>1.0822763559418</c:v>
+                  <c:v>1.08226393582676</c:v>
                 </c:pt>
                 <c:pt idx="6">
-                  <c:v>1.12451291847647</c:v>
+                  <c:v>1.1244978630768</c:v>
                 </c:pt>
               </c:numCache>
             </c:numRef>
@@ -376,25 +376,25 @@
                 <c:formatCode>General</c:formatCode>
                 <c:ptCount val="7"/>
                 <c:pt idx="0">
-                  <c:v>-0.105039875159628</c:v>
+                  <c:v>-0.105041602515047</c:v>
                 </c:pt>
                 <c:pt idx="1">
-                  <c:v>-0.0357172687400985</c:v>
+                  <c:v>-0.0357191217961267</c:v>
                 </c:pt>
                 <c:pt idx="2">
-                  <c:v>-0.0115188870758636</c:v>
+                  <c:v>-0.0115207822237074</c:v>
                 </c:pt>
                 <c:pt idx="3">
-                  <c:v>0.000781046147557918</c:v>
+                  <c:v>0.000779130009872731</c:v>
                 </c:pt>
                 <c:pt idx="4">
-                  <c:v>0.00823892555745531</c:v>
+                  <c:v>0.00823699655192778</c:v>
                 </c:pt>
                 <c:pt idx="5">
-                  <c:v>0.013264969325727</c:v>
+                  <c:v>0.0132630312921269</c:v>
                 </c:pt>
                 <c:pt idx="6">
-                  <c:v>0.0169055920708845</c:v>
+                  <c:v>0.0169036471007922</c:v>
                 </c:pt>
               </c:numCache>
             </c:numRef>
@@ -6296,7 +6296,7 @@
                 </a:solidFill>
                 <a:latin typeface="Cambria"/>
               </a:rPr>
-              <a:t>$114,507mm</a:t>
+              <a:t>$114,506mm</a:t>
             </a:r>
           </a:p>
         </p:txBody>
@@ -6788,7 +6788,7 @@
                           </a:solidFill>
                           <a:latin typeface="Calibri"/>
                         </a:rPr>
-                        <a:t>7.1%</a:t>
+                        <a:t>7.0%</a:t>
                       </a:r>
                     </a:p>
                   </a:txBody>

--- a/03_Private_Equity/presentations/pe-public-home-depot-2023-ic-memo.pptx
+++ b/03_Private_Equity/presentations/pe-public-home-depot-2023-ic-memo.pptx
@@ -188,25 +188,25 @@
                 <c:formatCode>General</c:formatCode>
                 <c:ptCount val="7"/>
                 <c:pt idx="0">
-                  <c:v>0.894958397484953</c:v>
+                  <c:v>0.985059383901521</c:v>
                 </c:pt>
                 <c:pt idx="1">
-                  <c:v>0.929837612069633</c:v>
+                  <c:v>1.10974169859953</c:v>
                 </c:pt>
                 <c:pt idx="2">
-                  <c:v>0.965834309462759</c:v>
+                  <c:v>1.24454524467275</c:v>
                 </c:pt>
                 <c:pt idx="3">
-                  <c:v>1.00312016419316</c:v>
+                  <c:v>1.39025600380232</c:v>
                 </c:pt>
                 <c:pt idx="4">
-                  <c:v>1.04186907558302</c:v>
+                  <c:v>1.54771316501356</c:v>
                 </c:pt>
                 <c:pt idx="5">
-                  <c:v>1.08226393582676</c:v>
+                  <c:v>1.71782062722811</c:v>
                 </c:pt>
                 <c:pt idx="6">
-                  <c:v>1.1244978630768</c:v>
+                  <c:v>1.90155249451074</c:v>
                 </c:pt>
               </c:numCache>
             </c:numRef>
@@ -376,25 +376,25 @@
                 <c:formatCode>General</c:formatCode>
                 <c:ptCount val="7"/>
                 <c:pt idx="0">
-                  <c:v>-0.105041602515047</c:v>
+                  <c:v>-0.0149406160984794</c:v>
                 </c:pt>
                 <c:pt idx="1">
-                  <c:v>-0.0357191217961267</c:v>
+                  <c:v>0.053442783733189</c:v>
                 </c:pt>
                 <c:pt idx="2">
-                  <c:v>-0.0115207822237074</c:v>
+                  <c:v>0.0756481383470085</c:v>
                 </c:pt>
                 <c:pt idx="3">
-                  <c:v>0.000779130009872731</c:v>
+                  <c:v>0.0858596488737349</c:v>
                 </c:pt>
                 <c:pt idx="4">
-                  <c:v>0.00823699655192778</c:v>
+                  <c:v>0.0912847728470427</c:v>
                 </c:pt>
                 <c:pt idx="5">
-                  <c:v>0.0132630312921269</c:v>
+                  <c:v>0.0943669501469977</c:v>
                 </c:pt>
                 <c:pt idx="6">
-                  <c:v>0.0169036471007922</c:v>
+                  <c:v>0.0961566351060408</c:v>
                 </c:pt>
               </c:numCache>
             </c:numRef>
@@ -3785,7 +3785,7 @@
                 </a:solidFill>
                 <a:latin typeface="Calibri"/>
               </a:rPr>
-              <a:t>Real, sourced: LTM revenue, EBITDA margin, and revenue growth are Home Depot's own disclosed FY2023 figures, from Home Depot 2023 Form 10-K (C5, C6, C7).</a:t>
+              <a:t>Real, sourced: Capex / revenue (C10) — Home Depot FY2023 Cash Flow Statement (Alpha Vantage, SEC-derived); Cash tax rate (C12) — Home Depot Q4 &amp; FY2023 Earnings Call Transcript (2024-02-20); LTM revenue (C5) — Home Depot 2023 Form 10-K; LTM EBITDA margin (C6) — Home Depot Q4 &amp; FY2023 Earnings Call Transcript (2024-02-20); Annual revenue growth (C7) — Home Depot Q4 &amp; FY2023 Earnings Call Transcript (2024-02-20); D&amp;A / revenue (C9) — Home Depot FY2023 Cash Flow Statement (Alpha Vantage, SEC-derived).</a:t>
             </a:r>
           </a:p>
           <a:p>
@@ -4212,7 +4212,7 @@
                 </a:solidFill>
                 <a:latin typeface="Cambria"/>
               </a:rPr>
-              <a:t>15.3%</a:t>
+              <a:t>16.3%</a:t>
             </a:r>
           </a:p>
         </p:txBody>
@@ -4278,11 +4278,11 @@
             <a:r>
               <a:rPr sz="900" b="0" i="1">
                 <a:solidFill>
-                  <a:srgbClr val="1B7A43"/>
+                  <a:srgbClr val="8A5A00"/>
                 </a:solidFill>
                 <a:latin typeface="Calibri"/>
               </a:rPr>
-              <a:t>Home Depot 2023 Form 10-K</a:t>
+              <a:t>Home Depot Q4 &amp; FY2023 Earnings Call Transcript (2024-02-20)</a:t>
             </a:r>
           </a:p>
         </p:txBody>
@@ -4357,11 +4357,11 @@
             <a:r>
               <a:rPr sz="2600" b="1" i="0">
                 <a:solidFill>
-                  <a:srgbClr val="A31E2B"/>
+                  <a:srgbClr val="1E2761"/>
                 </a:solidFill>
                 <a:latin typeface="Cambria"/>
               </a:rPr>
-              <a:t>-3.0%</a:t>
+              <a:t>1.0%</a:t>
             </a:r>
           </a:p>
         </p:txBody>
@@ -4427,11 +4427,11 @@
             <a:r>
               <a:rPr sz="900" b="0" i="1">
                 <a:solidFill>
-                  <a:srgbClr val="1B7A43"/>
+                  <a:srgbClr val="8A5A00"/>
                 </a:solidFill>
                 <a:latin typeface="Calibri"/>
               </a:rPr>
-              <a:t>Home Depot 2023 Form 10-K</a:t>
+              <a:t>Home Depot Q4 &amp; FY2023 Earnings Call Transcript (2024-02-20)</a:t>
             </a:r>
           </a:p>
         </p:txBody>
@@ -4460,13 +4460,13 @@
           <a:p>
             <a:pPr algn="l"/>
             <a:r>
-              <a:rPr sz="1400" b="0" i="0">
+              <a:rPr sz="1300" b="0" i="0">
                 <a:solidFill>
                   <a:srgbClr val="222733"/>
                 </a:solidFill>
                 <a:latin typeface="Calibri"/>
               </a:rPr>
-              <a:t>Home Depot's FY2023 (fiscal year ended January 2024) results reflect a post-pandemic normalization: revenue declined year over year against a very strong FY2022/2023 comparison base, consistent with the company's own reported deceleration in home-improvement spend.</a:t>
+              <a:t>Home Depot's FY2023 (fiscal year ended January 2024) revenue actually declined 3.0% year over year against a very strong FY2022 comparison base -- comp sales -3.2%, big-ticket (&gt;$1,000) transactions -6.9% in Q4, consistent with the company's own reported deceleration in discretionary home-improvement spend. The revenue-growth figure shown above (+1.0%) is not that trailing actual -- it is management's own FY2024 total-sales-growth guidance from the same earnings call, used here because it is what the model's multi-year forecast mechanic actually needs: a forward-looking rate, not a single historical year held constant.</a:t>
             </a:r>
           </a:p>
         </p:txBody>
@@ -4501,7 +4501,7 @@
                 </a:solidFill>
                 <a:latin typeface="Calibri"/>
               </a:rPr>
-              <a:t>Source: Home Depot 2023 Form 10-K — https://www.sec.gov/Archives/edgar/data/354950/000035495024000062/hd-20240128.htm</a:t>
+              <a:t>Sources: Home Depot FY2023 Cash Flow Statement (Alpha Vantage, SEC-derived) — https://www.alphavantage.co/documentation/#cash-flow; Home Depot Q4 &amp; FY2023 Earnings Call Transcript (2024-02-20) — https://www.alphavantage.co/documentation/#earnings-call-transcripts; Home Depot 2023 Form 10-K — https://www.sec.gov/Archives/edgar/data/354950/000035495024000062/hd-20240128.htm</a:t>
             </a:r>
           </a:p>
         </p:txBody>
@@ -4745,7 +4745,7 @@
                           </a:solidFill>
                           <a:latin typeface="Calibri"/>
                         </a:rPr>
-                        <a:t>233,584</a:t>
+                        <a:t>248,850</a:t>
                       </a:r>
                     </a:p>
                   </a:txBody>
@@ -4841,7 +4841,7 @@
                           </a:solidFill>
                           <a:latin typeface="Calibri"/>
                         </a:rPr>
-                        <a:t>4,672</a:t>
+                        <a:t>4,977</a:t>
                       </a:r>
                     </a:p>
                   </a:txBody>
@@ -4937,7 +4937,7 @@
                           </a:solidFill>
                           <a:latin typeface="Calibri"/>
                         </a:rPr>
-                        <a:t>238,375</a:t>
+                        <a:t>253,947</a:t>
                       </a:r>
                     </a:p>
                   </a:txBody>
@@ -5107,7 +5107,7 @@
                           </a:solidFill>
                           <a:latin typeface="Calibri"/>
                         </a:rPr>
-                        <a:t>93,433</a:t>
+                        <a:t>99,540</a:t>
                       </a:r>
                     </a:p>
                   </a:txBody>
@@ -5155,7 +5155,7 @@
                           </a:solidFill>
                           <a:latin typeface="Calibri"/>
                         </a:rPr>
-                        <a:t>35,038</a:t>
+                        <a:t>37,328</a:t>
                       </a:r>
                     </a:p>
                   </a:txBody>
@@ -5203,7 +5203,7 @@
                           </a:solidFill>
                           <a:latin typeface="Calibri"/>
                         </a:rPr>
-                        <a:t>109,904</a:t>
+                        <a:t>117,080</a:t>
                       </a:r>
                     </a:p>
                   </a:txBody>
@@ -5251,7 +5251,7 @@
                           </a:solidFill>
                           <a:latin typeface="Calibri"/>
                         </a:rPr>
-                        <a:t>238,375</a:t>
+                        <a:t>253,947</a:t>
                       </a:r>
                     </a:p>
                   </a:txBody>
@@ -5998,7 +5998,7 @@
                 </a:solidFill>
                 <a:latin typeface="Cambria"/>
               </a:rPr>
-              <a:t>1.0x</a:t>
+              <a:t>1.5x</a:t>
             </a:r>
           </a:p>
         </p:txBody>
@@ -6147,7 +6147,7 @@
                 </a:solidFill>
                 <a:latin typeface="Cambria"/>
               </a:rPr>
-              <a:t>0.8%</a:t>
+              <a:t>9.1%</a:t>
             </a:r>
           </a:p>
         </p:txBody>
@@ -6296,7 +6296,7 @@
                 </a:solidFill>
                 <a:latin typeface="Cambria"/>
               </a:rPr>
-              <a:t>$114,506mm</a:t>
+              <a:t>$181,206mm</a:t>
             </a:r>
           </a:p>
         </p:txBody>
@@ -6742,7 +6742,7 @@
                           </a:solidFill>
                           <a:latin typeface="Calibri"/>
                         </a:rPr>
-                        <a:t>-5.8%</a:t>
+                        <a:t>7.5%</a:t>
                       </a:r>
                     </a:p>
                   </a:txBody>
@@ -6765,7 +6765,7 @@
                           </a:solidFill>
                           <a:latin typeface="Calibri"/>
                         </a:rPr>
-                        <a:t>1.4%</a:t>
+                        <a:t>13.0%</a:t>
                       </a:r>
                     </a:p>
                   </a:txBody>
@@ -6788,7 +6788,7 @@
                           </a:solidFill>
                           <a:latin typeface="Calibri"/>
                         </a:rPr>
-                        <a:t>7.0%</a:t>
+                        <a:t>17.5%</a:t>
                       </a:r>
                     </a:p>
                   </a:txBody>
@@ -6811,7 +6811,7 @@
                           </a:solidFill>
                           <a:latin typeface="Calibri"/>
                         </a:rPr>
-                        <a:t>11.7%</a:t>
+                        <a:t>21.5%</a:t>
                       </a:r>
                     </a:p>
                   </a:txBody>
@@ -6834,7 +6834,7 @@
                           </a:solidFill>
                           <a:latin typeface="Calibri"/>
                         </a:rPr>
-                        <a:t>15.7%</a:t>
+                        <a:t>25.0%</a:t>
                       </a:r>
                     </a:p>
                   </a:txBody>
@@ -6882,7 +6882,7 @@
                           </a:solidFill>
                           <a:latin typeface="Calibri"/>
                         </a:rPr>
-                        <a:t>-11.6%</a:t>
+                        <a:t>1.0%</a:t>
                       </a:r>
                     </a:p>
                   </a:txBody>
@@ -6905,7 +6905,7 @@
                           </a:solidFill>
                           <a:latin typeface="Calibri"/>
                         </a:rPr>
-                        <a:t>-4.8%</a:t>
+                        <a:t>6.1%</a:t>
                       </a:r>
                     </a:p>
                   </a:txBody>
@@ -6928,7 +6928,7 @@
                           </a:solidFill>
                           <a:latin typeface="Calibri"/>
                         </a:rPr>
-                        <a:t>0.5%</a:t>
+                        <a:t>10.4%</a:t>
                       </a:r>
                     </a:p>
                   </a:txBody>
@@ -6951,7 +6951,7 @@
                           </a:solidFill>
                           <a:latin typeface="Calibri"/>
                         </a:rPr>
-                        <a:t>4.9%</a:t>
+                        <a:t>14.1%</a:t>
                       </a:r>
                     </a:p>
                   </a:txBody>
@@ -6974,7 +6974,7 @@
                           </a:solidFill>
                           <a:latin typeface="Calibri"/>
                         </a:rPr>
-                        <a:t>8.6%</a:t>
+                        <a:t>17.4%</a:t>
                       </a:r>
                     </a:p>
                   </a:txBody>
@@ -7022,7 +7022,7 @@
                           </a:solidFill>
                           <a:latin typeface="Calibri"/>
                         </a:rPr>
-                        <a:t>-15.7%</a:t>
+                        <a:t>-3.8%</a:t>
                       </a:r>
                     </a:p>
                   </a:txBody>
@@ -7045,7 +7045,7 @@
                           </a:solidFill>
                           <a:latin typeface="Calibri"/>
                         </a:rPr>
-                        <a:t>-9.2%</a:t>
+                        <a:t>1.1%</a:t>
                       </a:r>
                     </a:p>
                   </a:txBody>
@@ -7068,7 +7068,7 @@
                           </a:solidFill>
                           <a:latin typeface="Calibri"/>
                         </a:rPr>
-                        <a:t>-4.2%</a:t>
+                        <a:t>5.2%</a:t>
                       </a:r>
                     </a:p>
                   </a:txBody>
@@ -7091,7 +7091,7 @@
                           </a:solidFill>
                           <a:latin typeface="Calibri"/>
                         </a:rPr>
-                        <a:t>-0.0%</a:t>
+                        <a:t>8.8%</a:t>
                       </a:r>
                     </a:p>
                   </a:txBody>
@@ -7114,7 +7114,7 @@
                           </a:solidFill>
                           <a:latin typeface="Calibri"/>
                         </a:rPr>
-                        <a:t>3.5%</a:t>
+                        <a:t>11.9%</a:t>
                       </a:r>
                     </a:p>
                   </a:txBody>
@@ -7162,7 +7162,7 @@
                           </a:solidFill>
                           <a:latin typeface="Calibri"/>
                         </a:rPr>
-                        <a:t>-18.9%</a:t>
+                        <a:t>-7.4%</a:t>
                       </a:r>
                     </a:p>
                   </a:txBody>
@@ -7185,7 +7185,7 @@
                           </a:solidFill>
                           <a:latin typeface="Calibri"/>
                         </a:rPr>
-                        <a:t>-12.6%</a:t>
+                        <a:t>-2.7%</a:t>
                       </a:r>
                     </a:p>
                   </a:txBody>
@@ -7208,7 +7208,7 @@
                           </a:solidFill>
                           <a:latin typeface="Calibri"/>
                         </a:rPr>
-                        <a:t>-7.8%</a:t>
+                        <a:t>1.2%</a:t>
                       </a:r>
                     </a:p>
                   </a:txBody>
@@ -7231,7 +7231,7 @@
                           </a:solidFill>
                           <a:latin typeface="Calibri"/>
                         </a:rPr>
-                        <a:t>-3.8%</a:t>
+                        <a:t>4.6%</a:t>
                       </a:r>
                     </a:p>
                   </a:txBody>
@@ -7254,7 +7254,7 @@
                           </a:solidFill>
                           <a:latin typeface="Calibri"/>
                         </a:rPr>
-                        <a:t>-0.4%</a:t>
+                        <a:t>7.7%</a:t>
                       </a:r>
                     </a:p>
                   </a:txBody>
@@ -7302,7 +7302,7 @@
                           </a:solidFill>
                           <a:latin typeface="Calibri"/>
                         </a:rPr>
-                        <a:t>-21.5%</a:t>
+                        <a:t>-10.3%</a:t>
                       </a:r>
                     </a:p>
                   </a:txBody>
@@ -7325,7 +7325,7 @@
                           </a:solidFill>
                           <a:latin typeface="Calibri"/>
                         </a:rPr>
-                        <a:t>-15.4%</a:t>
+                        <a:t>-5.8%</a:t>
                       </a:r>
                     </a:p>
                   </a:txBody>
@@ -7348,7 +7348,7 @@
                           </a:solidFill>
                           <a:latin typeface="Calibri"/>
                         </a:rPr>
-                        <a:t>-10.7%</a:t>
+                        <a:t>-2.0%</a:t>
                       </a:r>
                     </a:p>
                   </a:txBody>
@@ -7371,7 +7371,7 @@
                           </a:solidFill>
                           <a:latin typeface="Calibri"/>
                         </a:rPr>
-                        <a:t>-6.9%</a:t>
+                        <a:t>1.3%</a:t>
                       </a:r>
                     </a:p>
                   </a:txBody>
@@ -7394,7 +7394,7 @@
                           </a:solidFill>
                           <a:latin typeface="Calibri"/>
                         </a:rPr>
-                        <a:t>-3.5%</a:t>
+                        <a:t>4.2%</a:t>
                       </a:r>
                     </a:p>
                   </a:txBody>
@@ -7439,7 +7439,7 @@
                 </a:solidFill>
                 <a:latin typeface="Calibri"/>
               </a:rPr>
-              <a:t>Rows are the entry multiple paid; columns are the exit multiple realized. The base case (10.0x entry / 10.0x exit, no multiple expansion) clears essentially breakeven — returns are dominated by whether the buyer pays a premium or gets multiple expansion at exit, not by operating performance alone given FY2023's revenue decline.</a:t>
+              <a:t>Rows are the entry multiple paid; columns are the exit multiple realized. The base case (10.0x entry / 10.0x exit, no multiple expansion) clears essentially breakeven — returns are dominated by whether the buyer pays a premium or gets multiple expansion at exit, not by operating performance alone given the modeled 1.0% annual revenue growth.</a:t>
             </a:r>
           </a:p>
         </p:txBody>
@@ -7606,7 +7606,7 @@
                 </a:solidFill>
                 <a:latin typeface="Calibri"/>
               </a:rPr>
-              <a:t>At these illustrative terms, the deal does not clear a typical private-equity return hurdle: 1.0x MOIC and 0.8% IRR at a Year 5 exit, against a common 20%+ IRR / 2.5x+ MOIC target.</a:t>
+              <a:t>At these illustrative terms, the deal does not clear a typical private-equity return hurdle: 1.5x MOIC and 9.1% IRR at a Year 5 exit, against a common 20%+ IRR / 2.5x+ MOIC target.</a:t>
             </a:r>
           </a:p>
         </p:txBody>
@@ -7645,7 +7645,7 @@
                 </a:solidFill>
                 <a:latin typeface="Calibri"/>
               </a:rPr>
-              <a:t>Returns are not driven by operating deleveraging alone — FY2023 revenue is declining (-3.0%, real), so EBITDA growth depends entirely on the modeled 0.5pt/year margin expansion.</a:t>
+              <a:t>Returns are not driven by operating deleveraging alone — FY2023's actual revenue declined 3.0% (real), and the model projects only 1.0%/year forward (management's own FY2024 guidance), so EBITDA growth leans heavily on the modeled 0.5pt/year margin expansion, an illustrative assumption not disclosed guidance.</a:t>
             </a:r>
           </a:p>
           <a:p>

--- a/03_Private_Equity/presentations/pe-public-home-depot-2023-ic-memo.pptx
+++ b/03_Private_Equity/presentations/pe-public-home-depot-2023-ic-memo.pptx
@@ -188,25 +188,25 @@
                 <c:formatCode>General</c:formatCode>
                 <c:ptCount val="7"/>
                 <c:pt idx="0">
-                  <c:v>0.985059383901521</c:v>
+                  <c:v>0.912266825977136</c:v>
                 </c:pt>
                 <c:pt idx="1">
-                  <c:v>1.10974169859953</c:v>
+                  <c:v>0.966519201452483</c:v>
                 </c:pt>
                 <c:pt idx="2">
-                  <c:v>1.24454524467275</c:v>
+                  <c:v>1.02412792298708</c:v>
                 </c:pt>
                 <c:pt idx="3">
-                  <c:v>1.39025600380232</c:v>
+                  <c:v>1.08534956229167</c:v>
                 </c:pt>
                 <c:pt idx="4">
-                  <c:v>1.54771316501356</c:v>
+                  <c:v>1.15045041672058</c:v>
                 </c:pt>
                 <c:pt idx="5">
-                  <c:v>1.71782062722811</c:v>
+                  <c:v>1.21971677290959</c:v>
                 </c:pt>
                 <c:pt idx="6">
-                  <c:v>1.90155249451074</c:v>
+                  <c:v>1.2934570253961</c:v>
                 </c:pt>
               </c:numCache>
             </c:numRef>
@@ -376,25 +376,25 @@
                 <c:formatCode>General</c:formatCode>
                 <c:ptCount val="7"/>
                 <c:pt idx="0">
-                  <c:v>-0.0149406160984794</c:v>
+                  <c:v>-0.087733174022864</c:v>
                 </c:pt>
                 <c:pt idx="1">
-                  <c:v>0.053442783733189</c:v>
+                  <c:v>-0.0168829156949397</c:v>
                 </c:pt>
                 <c:pt idx="2">
-                  <c:v>0.0756481383470085</c:v>
+                  <c:v>0.00797881026828362</c:v>
                 </c:pt>
                 <c:pt idx="3">
-                  <c:v>0.0858596488737349</c:v>
+                  <c:v>0.0206865897800075</c:v>
                 </c:pt>
                 <c:pt idx="4">
-                  <c:v>0.0912847728470427</c:v>
+                  <c:v>0.0284272633192819</c:v>
                 </c:pt>
                 <c:pt idx="5">
-                  <c:v>0.0943669501469977</c:v>
+                  <c:v>0.0336571173086588</c:v>
                 </c:pt>
                 <c:pt idx="6">
-                  <c:v>0.0961566351060408</c:v>
+                  <c:v>0.0374437818774869</c:v>
                 </c:pt>
               </c:numCache>
             </c:numRef>
@@ -3785,7 +3785,7 @@
                 </a:solidFill>
                 <a:latin typeface="Calibri"/>
               </a:rPr>
-              <a:t>Real, sourced: Capex / revenue (C10) — Home Depot FY2023 Cash Flow Statement (Alpha Vantage, SEC-derived); Cash tax rate (C12) — Home Depot Q4 &amp; FY2023 Earnings Call Transcript (2024-02-20); LTM revenue (C5) — Home Depot 2023 Form 10-K; LTM EBITDA margin (C6) — Home Depot Q4 &amp; FY2023 Earnings Call Transcript (2024-02-20); Annual revenue growth (C7) — Home Depot Q4 &amp; FY2023 Earnings Call Transcript (2024-02-20); D&amp;A / revenue (C9) — Home Depot FY2023 Cash Flow Statement (Alpha Vantage, SEC-derived).</a:t>
+              <a:t>Real, sourced: Capex / revenue (C10) — Home Depot FY2023 Cash Flow Statement (Alpha Vantage, SEC-derived); Cash tax rate (C12) — Home Depot Q4 &amp; FY2023 Earnings Call Transcript (2024-02-20); LTM revenue (C5) — Home Depot 2023 Form 10-K; LTM EBITDA margin (C6) — Home Depot Q4 &amp; FY2023 Earnings Call Transcript (2024-02-20); Annual revenue growth (C7) — Home Depot Q4 &amp; FY2023 Earnings Call Transcript (2024-02-20); Annual EBITDA margin expansion (C8) — Home Depot Q4 &amp; FY2023 Earnings Call Transcript (2024-02-20); D&amp;A / revenue (C9) — Home Depot FY2023 Cash Flow Statement (Alpha Vantage, SEC-derived).</a:t>
             </a:r>
           </a:p>
           <a:p>
@@ -5998,7 +5998,7 @@
                 </a:solidFill>
                 <a:latin typeface="Cambria"/>
               </a:rPr>
-              <a:t>1.5x</a:t>
+              <a:t>1.2x</a:t>
             </a:r>
           </a:p>
         </p:txBody>
@@ -6147,7 +6147,7 @@
                 </a:solidFill>
                 <a:latin typeface="Cambria"/>
               </a:rPr>
-              <a:t>9.1%</a:t>
+              <a:t>2.8%</a:t>
             </a:r>
           </a:p>
         </p:txBody>
@@ -6296,7 +6296,7 @@
                 </a:solidFill>
                 <a:latin typeface="Cambria"/>
               </a:rPr>
-              <a:t>$181,206mm</a:t>
+              <a:t>$134,694mm</a:t>
             </a:r>
           </a:p>
         </p:txBody>
@@ -6742,7 +6742,7 @@
                           </a:solidFill>
                           <a:latin typeface="Calibri"/>
                         </a:rPr>
-                        <a:t>7.5%</a:t>
+                        <a:t>-2.5%</a:t>
                       </a:r>
                     </a:p>
                   </a:txBody>
@@ -6765,7 +6765,53 @@
                           </a:solidFill>
                           <a:latin typeface="Calibri"/>
                         </a:rPr>
-                        <a:t>13.0%</a:t>
+                        <a:t>4.1%</a:t>
+                      </a:r>
+                    </a:p>
+                  </a:txBody>
+                  <a:tcPr>
+                    <a:solidFill>
+                      <a:srgbClr val="FFFFFF"/>
+                    </a:solidFill>
+                  </a:tcPr>
+                </a:tc>
+                <a:tc>
+                  <a:txBody>
+                    <a:bodyPr/>
+                    <a:lstStyle/>
+                    <a:p>
+                      <a:pPr algn="r"/>
+                      <a:r>
+                        <a:rPr sz="1300">
+                          <a:solidFill>
+                            <a:srgbClr val="222733"/>
+                          </a:solidFill>
+                          <a:latin typeface="Calibri"/>
+                        </a:rPr>
+                        <a:t>9.3%</a:t>
+                      </a:r>
+                    </a:p>
+                  </a:txBody>
+                  <a:tcPr>
+                    <a:solidFill>
+                      <a:srgbClr val="FFFFFF"/>
+                    </a:solidFill>
+                  </a:tcPr>
+                </a:tc>
+                <a:tc>
+                  <a:txBody>
+                    <a:bodyPr/>
+                    <a:lstStyle/>
+                    <a:p>
+                      <a:pPr algn="r"/>
+                      <a:r>
+                        <a:rPr sz="1300">
+                          <a:solidFill>
+                            <a:srgbClr val="222733"/>
+                          </a:solidFill>
+                          <a:latin typeface="Calibri"/>
+                        </a:rPr>
+                        <a:t>13.7%</a:t>
                       </a:r>
                     </a:p>
                   </a:txBody>
@@ -6789,52 +6835,6 @@
                           <a:latin typeface="Calibri"/>
                         </a:rPr>
                         <a:t>17.5%</a:t>
-                      </a:r>
-                    </a:p>
-                  </a:txBody>
-                  <a:tcPr>
-                    <a:solidFill>
-                      <a:srgbClr val="FFFFFF"/>
-                    </a:solidFill>
-                  </a:tcPr>
-                </a:tc>
-                <a:tc>
-                  <a:txBody>
-                    <a:bodyPr/>
-                    <a:lstStyle/>
-                    <a:p>
-                      <a:pPr algn="r"/>
-                      <a:r>
-                        <a:rPr sz="1300">
-                          <a:solidFill>
-                            <a:srgbClr val="222733"/>
-                          </a:solidFill>
-                          <a:latin typeface="Calibri"/>
-                        </a:rPr>
-                        <a:t>21.5%</a:t>
-                      </a:r>
-                    </a:p>
-                  </a:txBody>
-                  <a:tcPr>
-                    <a:solidFill>
-                      <a:srgbClr val="FFFFFF"/>
-                    </a:solidFill>
-                  </a:tcPr>
-                </a:tc>
-                <a:tc>
-                  <a:txBody>
-                    <a:bodyPr/>
-                    <a:lstStyle/>
-                    <a:p>
-                      <a:pPr algn="r"/>
-                      <a:r>
-                        <a:rPr sz="1300">
-                          <a:solidFill>
-                            <a:srgbClr val="222733"/>
-                          </a:solidFill>
-                          <a:latin typeface="Calibri"/>
-                        </a:rPr>
-                        <a:t>25.0%</a:t>
                       </a:r>
                     </a:p>
                   </a:txBody>
@@ -6882,7 +6882,7 @@
                           </a:solidFill>
                           <a:latin typeface="Calibri"/>
                         </a:rPr>
-                        <a:t>1.0%</a:t>
+                        <a:t>-8.4%</a:t>
                       </a:r>
                     </a:p>
                   </a:txBody>
@@ -6905,7 +6905,7 @@
                           </a:solidFill>
                           <a:latin typeface="Calibri"/>
                         </a:rPr>
-                        <a:t>6.1%</a:t>
+                        <a:t>-2.3%</a:t>
                       </a:r>
                     </a:p>
                   </a:txBody>
@@ -6928,7 +6928,7 @@
                           </a:solidFill>
                           <a:latin typeface="Calibri"/>
                         </a:rPr>
-                        <a:t>10.4%</a:t>
+                        <a:t>2.7%</a:t>
                       </a:r>
                     </a:p>
                   </a:txBody>
@@ -6951,7 +6951,7 @@
                           </a:solidFill>
                           <a:latin typeface="Calibri"/>
                         </a:rPr>
-                        <a:t>14.1%</a:t>
+                        <a:t>6.8%</a:t>
                       </a:r>
                     </a:p>
                   </a:txBody>
@@ -6974,7 +6974,7 @@
                           </a:solidFill>
                           <a:latin typeface="Calibri"/>
                         </a:rPr>
-                        <a:t>17.4%</a:t>
+                        <a:t>10.3%</a:t>
                       </a:r>
                     </a:p>
                   </a:txBody>
@@ -7022,7 +7022,7 @@
                           </a:solidFill>
                           <a:latin typeface="Calibri"/>
                         </a:rPr>
-                        <a:t>-3.8%</a:t>
+                        <a:t>-12.7%</a:t>
                       </a:r>
                     </a:p>
                   </a:txBody>
@@ -7045,7 +7045,53 @@
                           </a:solidFill>
                           <a:latin typeface="Calibri"/>
                         </a:rPr>
-                        <a:t>1.1%</a:t>
+                        <a:t>-6.8%</a:t>
+                      </a:r>
+                    </a:p>
+                  </a:txBody>
+                  <a:tcPr>
+                    <a:solidFill>
+                      <a:srgbClr val="FFFFFF"/>
+                    </a:solidFill>
+                  </a:tcPr>
+                </a:tc>
+                <a:tc>
+                  <a:txBody>
+                    <a:bodyPr/>
+                    <a:lstStyle/>
+                    <a:p>
+                      <a:pPr algn="r"/>
+                      <a:r>
+                        <a:rPr sz="1300">
+                          <a:solidFill>
+                            <a:srgbClr val="222733"/>
+                          </a:solidFill>
+                          <a:latin typeface="Calibri"/>
+                        </a:rPr>
+                        <a:t>-2.1%</a:t>
+                      </a:r>
+                    </a:p>
+                  </a:txBody>
+                  <a:tcPr>
+                    <a:solidFill>
+                      <a:srgbClr val="FFFFFF"/>
+                    </a:solidFill>
+                  </a:tcPr>
+                </a:tc>
+                <a:tc>
+                  <a:txBody>
+                    <a:bodyPr/>
+                    <a:lstStyle/>
+                    <a:p>
+                      <a:pPr algn="r"/>
+                      <a:r>
+                        <a:rPr sz="1300">
+                          <a:solidFill>
+                            <a:srgbClr val="222733"/>
+                          </a:solidFill>
+                          <a:latin typeface="Calibri"/>
+                        </a:rPr>
+                        <a:t>1.8%</a:t>
                       </a:r>
                     </a:p>
                   </a:txBody>
@@ -7069,52 +7115,6 @@
                           <a:latin typeface="Calibri"/>
                         </a:rPr>
                         <a:t>5.2%</a:t>
-                      </a:r>
-                    </a:p>
-                  </a:txBody>
-                  <a:tcPr>
-                    <a:solidFill>
-                      <a:srgbClr val="FFFFFF"/>
-                    </a:solidFill>
-                  </a:tcPr>
-                </a:tc>
-                <a:tc>
-                  <a:txBody>
-                    <a:bodyPr/>
-                    <a:lstStyle/>
-                    <a:p>
-                      <a:pPr algn="r"/>
-                      <a:r>
-                        <a:rPr sz="1300">
-                          <a:solidFill>
-                            <a:srgbClr val="222733"/>
-                          </a:solidFill>
-                          <a:latin typeface="Calibri"/>
-                        </a:rPr>
-                        <a:t>8.8%</a:t>
-                      </a:r>
-                    </a:p>
-                  </a:txBody>
-                  <a:tcPr>
-                    <a:solidFill>
-                      <a:srgbClr val="FFFFFF"/>
-                    </a:solidFill>
-                  </a:tcPr>
-                </a:tc>
-                <a:tc>
-                  <a:txBody>
-                    <a:bodyPr/>
-                    <a:lstStyle/>
-                    <a:p>
-                      <a:pPr algn="r"/>
-                      <a:r>
-                        <a:rPr sz="1300">
-                          <a:solidFill>
-                            <a:srgbClr val="222733"/>
-                          </a:solidFill>
-                          <a:latin typeface="Calibri"/>
-                        </a:rPr>
-                        <a:t>11.9%</a:t>
                       </a:r>
                     </a:p>
                   </a:txBody>
@@ -7162,7 +7162,7 @@
                           </a:solidFill>
                           <a:latin typeface="Calibri"/>
                         </a:rPr>
-                        <a:t>-7.4%</a:t>
+                        <a:t>-16.0%</a:t>
                       </a:r>
                     </a:p>
                   </a:txBody>
@@ -7185,7 +7185,53 @@
                           </a:solidFill>
                           <a:latin typeface="Calibri"/>
                         </a:rPr>
-                        <a:t>-2.7%</a:t>
+                        <a:t>-10.3%</a:t>
+                      </a:r>
+                    </a:p>
+                  </a:txBody>
+                  <a:tcPr>
+                    <a:solidFill>
+                      <a:srgbClr val="F4F6FC"/>
+                    </a:solidFill>
+                  </a:tcPr>
+                </a:tc>
+                <a:tc>
+                  <a:txBody>
+                    <a:bodyPr/>
+                    <a:lstStyle/>
+                    <a:p>
+                      <a:pPr algn="r"/>
+                      <a:r>
+                        <a:rPr sz="1300">
+                          <a:solidFill>
+                            <a:srgbClr val="222733"/>
+                          </a:solidFill>
+                          <a:latin typeface="Calibri"/>
+                        </a:rPr>
+                        <a:t>-5.8%</a:t>
+                      </a:r>
+                    </a:p>
+                  </a:txBody>
+                  <a:tcPr>
+                    <a:solidFill>
+                      <a:srgbClr val="F4F6FC"/>
+                    </a:solidFill>
+                  </a:tcPr>
+                </a:tc>
+                <a:tc>
+                  <a:txBody>
+                    <a:bodyPr/>
+                    <a:lstStyle/>
+                    <a:p>
+                      <a:pPr algn="r"/>
+                      <a:r>
+                        <a:rPr sz="1300">
+                          <a:solidFill>
+                            <a:srgbClr val="222733"/>
+                          </a:solidFill>
+                          <a:latin typeface="Calibri"/>
+                        </a:rPr>
+                        <a:t>-2.1%</a:t>
                       </a:r>
                     </a:p>
                   </a:txBody>
@@ -7209,52 +7255,6 @@
                           <a:latin typeface="Calibri"/>
                         </a:rPr>
                         <a:t>1.2%</a:t>
-                      </a:r>
-                    </a:p>
-                  </a:txBody>
-                  <a:tcPr>
-                    <a:solidFill>
-                      <a:srgbClr val="F4F6FC"/>
-                    </a:solidFill>
-                  </a:tcPr>
-                </a:tc>
-                <a:tc>
-                  <a:txBody>
-                    <a:bodyPr/>
-                    <a:lstStyle/>
-                    <a:p>
-                      <a:pPr algn="r"/>
-                      <a:r>
-                        <a:rPr sz="1300">
-                          <a:solidFill>
-                            <a:srgbClr val="222733"/>
-                          </a:solidFill>
-                          <a:latin typeface="Calibri"/>
-                        </a:rPr>
-                        <a:t>4.6%</a:t>
-                      </a:r>
-                    </a:p>
-                  </a:txBody>
-                  <a:tcPr>
-                    <a:solidFill>
-                      <a:srgbClr val="F4F6FC"/>
-                    </a:solidFill>
-                  </a:tcPr>
-                </a:tc>
-                <a:tc>
-                  <a:txBody>
-                    <a:bodyPr/>
-                    <a:lstStyle/>
-                    <a:p>
-                      <a:pPr algn="r"/>
-                      <a:r>
-                        <a:rPr sz="1300">
-                          <a:solidFill>
-                            <a:srgbClr val="222733"/>
-                          </a:solidFill>
-                          <a:latin typeface="Calibri"/>
-                        </a:rPr>
-                        <a:t>7.7%</a:t>
                       </a:r>
                     </a:p>
                   </a:txBody>
@@ -7302,7 +7302,7 @@
                           </a:solidFill>
                           <a:latin typeface="Calibri"/>
                         </a:rPr>
-                        <a:t>-10.3%</a:t>
+                        <a:t>-18.6%</a:t>
                       </a:r>
                     </a:p>
                   </a:txBody>
@@ -7325,7 +7325,53 @@
                           </a:solidFill>
                           <a:latin typeface="Calibri"/>
                         </a:rPr>
-                        <a:t>-5.8%</a:t>
+                        <a:t>-13.2%</a:t>
+                      </a:r>
+                    </a:p>
+                  </a:txBody>
+                  <a:tcPr>
+                    <a:solidFill>
+                      <a:srgbClr val="FFFFFF"/>
+                    </a:solidFill>
+                  </a:tcPr>
+                </a:tc>
+                <a:tc>
+                  <a:txBody>
+                    <a:bodyPr/>
+                    <a:lstStyle/>
+                    <a:p>
+                      <a:pPr algn="r"/>
+                      <a:r>
+                        <a:rPr sz="1300">
+                          <a:solidFill>
+                            <a:srgbClr val="222733"/>
+                          </a:solidFill>
+                          <a:latin typeface="Calibri"/>
+                        </a:rPr>
+                        <a:t>-8.8%</a:t>
+                      </a:r>
+                    </a:p>
+                  </a:txBody>
+                  <a:tcPr>
+                    <a:solidFill>
+                      <a:srgbClr val="FFFFFF"/>
+                    </a:solidFill>
+                  </a:tcPr>
+                </a:tc>
+                <a:tc>
+                  <a:txBody>
+                    <a:bodyPr/>
+                    <a:lstStyle/>
+                    <a:p>
+                      <a:pPr algn="r"/>
+                      <a:r>
+                        <a:rPr sz="1300">
+                          <a:solidFill>
+                            <a:srgbClr val="222733"/>
+                          </a:solidFill>
+                          <a:latin typeface="Calibri"/>
+                        </a:rPr>
+                        <a:t>-5.2%</a:t>
                       </a:r>
                     </a:p>
                   </a:txBody>
@@ -7358,52 +7404,6 @@
                     </a:solidFill>
                   </a:tcPr>
                 </a:tc>
-                <a:tc>
-                  <a:txBody>
-                    <a:bodyPr/>
-                    <a:lstStyle/>
-                    <a:p>
-                      <a:pPr algn="r"/>
-                      <a:r>
-                        <a:rPr sz="1300">
-                          <a:solidFill>
-                            <a:srgbClr val="222733"/>
-                          </a:solidFill>
-                          <a:latin typeface="Calibri"/>
-                        </a:rPr>
-                        <a:t>1.3%</a:t>
-                      </a:r>
-                    </a:p>
-                  </a:txBody>
-                  <a:tcPr>
-                    <a:solidFill>
-                      <a:srgbClr val="FFFFFF"/>
-                    </a:solidFill>
-                  </a:tcPr>
-                </a:tc>
-                <a:tc>
-                  <a:txBody>
-                    <a:bodyPr/>
-                    <a:lstStyle/>
-                    <a:p>
-                      <a:pPr algn="r"/>
-                      <a:r>
-                        <a:rPr sz="1300">
-                          <a:solidFill>
-                            <a:srgbClr val="222733"/>
-                          </a:solidFill>
-                          <a:latin typeface="Calibri"/>
-                        </a:rPr>
-                        <a:t>4.2%</a:t>
-                      </a:r>
-                    </a:p>
-                  </a:txBody>
-                  <a:tcPr>
-                    <a:solidFill>
-                      <a:srgbClr val="FFFFFF"/>
-                    </a:solidFill>
-                  </a:tcPr>
-                </a:tc>
               </a:tr>
             </a:tbl>
           </a:graphicData>
@@ -7606,7 +7606,7 @@
                 </a:solidFill>
                 <a:latin typeface="Calibri"/>
               </a:rPr>
-              <a:t>At these illustrative terms, the deal does not clear a typical private-equity return hurdle: 1.5x MOIC and 9.1% IRR at a Year 5 exit, against a common 20%+ IRR / 2.5x+ MOIC target.</a:t>
+              <a:t>At these illustrative terms, the deal does not clear a typical private-equity return hurdle: 1.2x MOIC and 2.8% IRR at a Year 5 exit, against a common 20%+ IRR / 2.5x+ MOIC target.</a:t>
             </a:r>
           </a:p>
         </p:txBody>
